--- a/slides.pptx
+++ b/slides.pptx
@@ -34,13 +34,13 @@
       <p:boldItalic r:id="rId23"/>
     </p:embeddedFont>
     <p:embeddedFont>
-      <p:font typeface="Urbanist Medium"/>
+      <p:font typeface="Urbanist"/>
       <p:bold r:id="rId24"/>
       <p:italic r:id="rId25"/>
       <p:boldItalic r:id="rId26"/>
     </p:embeddedFont>
     <p:embeddedFont>
-      <p:font typeface="Urbanist"/>
+      <p:font typeface="Urbanist Medium"/>
       <p:bold r:id="rId24"/>
       <p:italic r:id="rId25"/>
       <p:boldItalic r:id="rId26"/>
@@ -280,7 +280,7 @@
                 <a:tab algn="l" pos="0"/>
               </a:tabLst>
             </a:pPr>
-            <a:fld id="{F2166FC9-1992-4617-BFA5-6F526516EA4D}" type="slidenum">
+            <a:fld id="{A6235FC3-5B1C-44FF-88BA-0D0334F960B1}" type="slidenum">
               <a:rPr lang="en-US" sz="1200" b="0" u="none" strike="noStrike">
                 <a:solidFill>
                   <a:srgbClr val="888888"/>
@@ -1386,7 +1386,7 @@
                 <a:tab algn="l" pos="0"/>
               </a:tabLst>
             </a:pPr>
-            <a:fld id="{8A0BA1A0-6565-4BDC-83D4-9B450AACA48A}" type="slidenum">
+            <a:fld id="{92051B40-65B5-45A1-9AC5-A0D6D423FE87}" type="slidenum">
               <a:rPr lang="en-US" sz="1200" b="0" u="none" strike="noStrike">
                 <a:solidFill>
                   <a:srgbClr val="888888"/>
@@ -2186,7 +2186,7 @@
                 <a:tab algn="l" pos="0"/>
               </a:tabLst>
             </a:pPr>
-            <a:fld id="{C98366B5-802E-4516-8EEB-CFB41972E2E7}" type="slidenum">
+            <a:fld id="{7803224C-BE5E-4FB3-AEAD-DB19AAF7E4EC}" type="slidenum">
               <a:rPr lang="en-US" sz="1200" b="0" u="none" strike="noStrike">
                 <a:solidFill>
                   <a:srgbClr val="888888"/>
@@ -2278,7 +2278,7 @@
                 <a:uFillTx/>
                 <a:latin typeface="Arial"/>
               </a:rPr>
-              <a:t>Click to </a:t>
+              <a:t>Click to edit </a:t>
             </a:r>
             <a:r>
               <a:rPr lang="ru-RU" sz="4400" b="0" u="none" strike="noStrike">
@@ -2289,18 +2289,7 @@
                 <a:uFillTx/>
                 <a:latin typeface="Arial"/>
               </a:rPr>
-              <a:t>edit the </a:t>
-            </a:r>
-            <a:r>
-              <a:rPr lang="ru-RU" sz="4400" b="0" u="none" strike="noStrike">
-                <a:solidFill>
-                  <a:srgbClr val="000000"/>
-                </a:solidFill>
-                <a:effectLst/>
-                <a:uFillTx/>
-                <a:latin typeface="Arial"/>
-              </a:rPr>
-              <a:t>title text </a:t>
+              <a:t>the title text </a:t>
             </a:r>
             <a:r>
               <a:rPr lang="ru-RU" sz="4400" b="0" u="none" strike="noStrike">
@@ -2766,7 +2755,7 @@
                 <a:tab algn="l" pos="0"/>
               </a:tabLst>
             </a:pPr>
-            <a:fld id="{327A984D-BC9B-463C-A110-66EACC89966A}" type="slidenum">
+            <a:fld id="{ADEE63E6-0964-4360-8F0C-FA4DC4AA434C}" type="slidenum">
               <a:rPr lang="en-US" sz="1200" b="0" u="none" strike="noStrike">
                 <a:solidFill>
                   <a:srgbClr val="888888"/>
@@ -3313,7 +3302,7 @@
                 <a:tab algn="l" pos="0"/>
               </a:tabLst>
             </a:pPr>
-            <a:fld id="{A82DD242-309D-4FB5-B992-ED12E4C8CA15}" type="slidenum">
+            <a:fld id="{0424C2FD-193D-4F8A-8C25-EFFF4BAC936C}" type="slidenum">
               <a:rPr lang="en-US" sz="1200" b="0" u="none" strike="noStrike">
                 <a:solidFill>
                   <a:srgbClr val="888888"/>
@@ -3405,7 +3394,18 @@
                 <a:uFillTx/>
                 <a:latin typeface="Arial"/>
               </a:rPr>
-              <a:t>Click to edit the title text format</a:t>
+              <a:t>Click to edit the </a:t>
+            </a:r>
+            <a:r>
+              <a:rPr lang="ru-RU" sz="4400" b="0" u="none" strike="noStrike">
+                <a:solidFill>
+                  <a:srgbClr val="000000"/>
+                </a:solidFill>
+                <a:effectLst/>
+                <a:uFillTx/>
+                <a:latin typeface="Arial"/>
+              </a:rPr>
+              <a:t>title text format</a:t>
             </a:r>
             <a:endParaRPr lang="ru-RU" sz="4400" b="0" u="none" strike="noStrike">
               <a:solidFill>
@@ -3607,7 +3607,7 @@
                 <a:tab algn="l" pos="0"/>
               </a:tabLst>
             </a:pPr>
-            <a:fld id="{5E5070A4-33C9-4559-93D4-FAF61CB3EA63}" type="slidenum">
+            <a:fld id="{F6DBEE81-AE03-4FFA-B5F4-40A2E3297139}" type="slidenum">
               <a:rPr lang="en-US" sz="1200" b="0" u="none" strike="noStrike">
                 <a:solidFill>
                   <a:srgbClr val="888888"/>
@@ -3699,7 +3699,381 @@
                 <a:uFillTx/>
                 <a:latin typeface="Arial"/>
               </a:rPr>
-              <a:t>Click to edit the title text format</a:t>
+              <a:t>C</a:t>
+            </a:r>
+            <a:r>
+              <a:rPr lang="ru-RU" sz="4400" b="0" u="none" strike="noStrike">
+                <a:solidFill>
+                  <a:srgbClr val="000000"/>
+                </a:solidFill>
+                <a:effectLst/>
+                <a:uFillTx/>
+                <a:latin typeface="Arial"/>
+              </a:rPr>
+              <a:t>l</a:t>
+            </a:r>
+            <a:r>
+              <a:rPr lang="ru-RU" sz="4400" b="0" u="none" strike="noStrike">
+                <a:solidFill>
+                  <a:srgbClr val="000000"/>
+                </a:solidFill>
+                <a:effectLst/>
+                <a:uFillTx/>
+                <a:latin typeface="Arial"/>
+              </a:rPr>
+              <a:t>i</a:t>
+            </a:r>
+            <a:r>
+              <a:rPr lang="ru-RU" sz="4400" b="0" u="none" strike="noStrike">
+                <a:solidFill>
+                  <a:srgbClr val="000000"/>
+                </a:solidFill>
+                <a:effectLst/>
+                <a:uFillTx/>
+                <a:latin typeface="Arial"/>
+              </a:rPr>
+              <a:t>c</a:t>
+            </a:r>
+            <a:r>
+              <a:rPr lang="ru-RU" sz="4400" b="0" u="none" strike="noStrike">
+                <a:solidFill>
+                  <a:srgbClr val="000000"/>
+                </a:solidFill>
+                <a:effectLst/>
+                <a:uFillTx/>
+                <a:latin typeface="Arial"/>
+              </a:rPr>
+              <a:t>k</a:t>
+            </a:r>
+            <a:r>
+              <a:rPr lang="ru-RU" sz="4400" b="0" u="none" strike="noStrike">
+                <a:solidFill>
+                  <a:srgbClr val="000000"/>
+                </a:solidFill>
+                <a:effectLst/>
+                <a:uFillTx/>
+                <a:latin typeface="Arial"/>
+              </a:rPr>
+              <a:t> </a:t>
+            </a:r>
+            <a:r>
+              <a:rPr lang="ru-RU" sz="4400" b="0" u="none" strike="noStrike">
+                <a:solidFill>
+                  <a:srgbClr val="000000"/>
+                </a:solidFill>
+                <a:effectLst/>
+                <a:uFillTx/>
+                <a:latin typeface="Arial"/>
+              </a:rPr>
+              <a:t>t</a:t>
+            </a:r>
+            <a:r>
+              <a:rPr lang="ru-RU" sz="4400" b="0" u="none" strike="noStrike">
+                <a:solidFill>
+                  <a:srgbClr val="000000"/>
+                </a:solidFill>
+                <a:effectLst/>
+                <a:uFillTx/>
+                <a:latin typeface="Arial"/>
+              </a:rPr>
+              <a:t>o</a:t>
+            </a:r>
+            <a:r>
+              <a:rPr lang="ru-RU" sz="4400" b="0" u="none" strike="noStrike">
+                <a:solidFill>
+                  <a:srgbClr val="000000"/>
+                </a:solidFill>
+                <a:effectLst/>
+                <a:uFillTx/>
+                <a:latin typeface="Arial"/>
+              </a:rPr>
+              <a:t> </a:t>
+            </a:r>
+            <a:r>
+              <a:rPr lang="ru-RU" sz="4400" b="0" u="none" strike="noStrike">
+                <a:solidFill>
+                  <a:srgbClr val="000000"/>
+                </a:solidFill>
+                <a:effectLst/>
+                <a:uFillTx/>
+                <a:latin typeface="Arial"/>
+              </a:rPr>
+              <a:t>e</a:t>
+            </a:r>
+            <a:r>
+              <a:rPr lang="ru-RU" sz="4400" b="0" u="none" strike="noStrike">
+                <a:solidFill>
+                  <a:srgbClr val="000000"/>
+                </a:solidFill>
+                <a:effectLst/>
+                <a:uFillTx/>
+                <a:latin typeface="Arial"/>
+              </a:rPr>
+              <a:t>d</a:t>
+            </a:r>
+            <a:r>
+              <a:rPr lang="ru-RU" sz="4400" b="0" u="none" strike="noStrike">
+                <a:solidFill>
+                  <a:srgbClr val="000000"/>
+                </a:solidFill>
+                <a:effectLst/>
+                <a:uFillTx/>
+                <a:latin typeface="Arial"/>
+              </a:rPr>
+              <a:t>i</a:t>
+            </a:r>
+            <a:r>
+              <a:rPr lang="ru-RU" sz="4400" b="0" u="none" strike="noStrike">
+                <a:solidFill>
+                  <a:srgbClr val="000000"/>
+                </a:solidFill>
+                <a:effectLst/>
+                <a:uFillTx/>
+                <a:latin typeface="Arial"/>
+              </a:rPr>
+              <a:t>t</a:t>
+            </a:r>
+            <a:r>
+              <a:rPr lang="ru-RU" sz="4400" b="0" u="none" strike="noStrike">
+                <a:solidFill>
+                  <a:srgbClr val="000000"/>
+                </a:solidFill>
+                <a:effectLst/>
+                <a:uFillTx/>
+                <a:latin typeface="Arial"/>
+              </a:rPr>
+              <a:t> </a:t>
+            </a:r>
+            <a:r>
+              <a:rPr lang="ru-RU" sz="4400" b="0" u="none" strike="noStrike">
+                <a:solidFill>
+                  <a:srgbClr val="000000"/>
+                </a:solidFill>
+                <a:effectLst/>
+                <a:uFillTx/>
+                <a:latin typeface="Arial"/>
+              </a:rPr>
+              <a:t>t</a:t>
+            </a:r>
+            <a:r>
+              <a:rPr lang="ru-RU" sz="4400" b="0" u="none" strike="noStrike">
+                <a:solidFill>
+                  <a:srgbClr val="000000"/>
+                </a:solidFill>
+                <a:effectLst/>
+                <a:uFillTx/>
+                <a:latin typeface="Arial"/>
+              </a:rPr>
+              <a:t>h</a:t>
+            </a:r>
+            <a:r>
+              <a:rPr lang="ru-RU" sz="4400" b="0" u="none" strike="noStrike">
+                <a:solidFill>
+                  <a:srgbClr val="000000"/>
+                </a:solidFill>
+                <a:effectLst/>
+                <a:uFillTx/>
+                <a:latin typeface="Arial"/>
+              </a:rPr>
+              <a:t>e</a:t>
+            </a:r>
+            <a:r>
+              <a:rPr lang="ru-RU" sz="4400" b="0" u="none" strike="noStrike">
+                <a:solidFill>
+                  <a:srgbClr val="000000"/>
+                </a:solidFill>
+                <a:effectLst/>
+                <a:uFillTx/>
+                <a:latin typeface="Arial"/>
+              </a:rPr>
+              <a:t> </a:t>
+            </a:r>
+            <a:r>
+              <a:rPr lang="ru-RU" sz="4400" b="0" u="none" strike="noStrike">
+                <a:solidFill>
+                  <a:srgbClr val="000000"/>
+                </a:solidFill>
+                <a:effectLst/>
+                <a:uFillTx/>
+                <a:latin typeface="Arial"/>
+              </a:rPr>
+              <a:t>t</a:t>
+            </a:r>
+            <a:r>
+              <a:rPr lang="ru-RU" sz="4400" b="0" u="none" strike="noStrike">
+                <a:solidFill>
+                  <a:srgbClr val="000000"/>
+                </a:solidFill>
+                <a:effectLst/>
+                <a:uFillTx/>
+                <a:latin typeface="Arial"/>
+              </a:rPr>
+              <a:t>i</a:t>
+            </a:r>
+            <a:r>
+              <a:rPr lang="ru-RU" sz="4400" b="0" u="none" strike="noStrike">
+                <a:solidFill>
+                  <a:srgbClr val="000000"/>
+                </a:solidFill>
+                <a:effectLst/>
+                <a:uFillTx/>
+                <a:latin typeface="Arial"/>
+              </a:rPr>
+              <a:t>t</a:t>
+            </a:r>
+            <a:r>
+              <a:rPr lang="ru-RU" sz="4400" b="0" u="none" strike="noStrike">
+                <a:solidFill>
+                  <a:srgbClr val="000000"/>
+                </a:solidFill>
+                <a:effectLst/>
+                <a:uFillTx/>
+                <a:latin typeface="Arial"/>
+              </a:rPr>
+              <a:t>l</a:t>
+            </a:r>
+            <a:r>
+              <a:rPr lang="ru-RU" sz="4400" b="0" u="none" strike="noStrike">
+                <a:solidFill>
+                  <a:srgbClr val="000000"/>
+                </a:solidFill>
+                <a:effectLst/>
+                <a:uFillTx/>
+                <a:latin typeface="Arial"/>
+              </a:rPr>
+              <a:t>e</a:t>
+            </a:r>
+            <a:r>
+              <a:rPr lang="ru-RU" sz="4400" b="0" u="none" strike="noStrike">
+                <a:solidFill>
+                  <a:srgbClr val="000000"/>
+                </a:solidFill>
+                <a:effectLst/>
+                <a:uFillTx/>
+                <a:latin typeface="Arial"/>
+              </a:rPr>
+              <a:t> </a:t>
+            </a:r>
+            <a:r>
+              <a:rPr lang="ru-RU" sz="4400" b="0" u="none" strike="noStrike">
+                <a:solidFill>
+                  <a:srgbClr val="000000"/>
+                </a:solidFill>
+                <a:effectLst/>
+                <a:uFillTx/>
+                <a:latin typeface="Arial"/>
+              </a:rPr>
+              <a:t>t</a:t>
+            </a:r>
+            <a:r>
+              <a:rPr lang="ru-RU" sz="4400" b="0" u="none" strike="noStrike">
+                <a:solidFill>
+                  <a:srgbClr val="000000"/>
+                </a:solidFill>
+                <a:effectLst/>
+                <a:uFillTx/>
+                <a:latin typeface="Arial"/>
+              </a:rPr>
+              <a:t>e</a:t>
+            </a:r>
+            <a:r>
+              <a:rPr lang="ru-RU" sz="4400" b="0" u="none" strike="noStrike">
+                <a:solidFill>
+                  <a:srgbClr val="000000"/>
+                </a:solidFill>
+                <a:effectLst/>
+                <a:uFillTx/>
+                <a:latin typeface="Arial"/>
+              </a:rPr>
+              <a:t>x</a:t>
+            </a:r>
+            <a:r>
+              <a:rPr lang="ru-RU" sz="4400" b="0" u="none" strike="noStrike">
+                <a:solidFill>
+                  <a:srgbClr val="000000"/>
+                </a:solidFill>
+                <a:effectLst/>
+                <a:uFillTx/>
+                <a:latin typeface="Arial"/>
+              </a:rPr>
+              <a:t>t</a:t>
+            </a:r>
+            <a:r>
+              <a:rPr lang="ru-RU" sz="4400" b="0" u="none" strike="noStrike">
+                <a:solidFill>
+                  <a:srgbClr val="000000"/>
+                </a:solidFill>
+                <a:effectLst/>
+                <a:uFillTx/>
+                <a:latin typeface="Arial"/>
+              </a:rPr>
+              <a:t> </a:t>
+            </a:r>
+            <a:r>
+              <a:rPr lang="ru-RU" sz="4400" b="0" u="none" strike="noStrike">
+                <a:solidFill>
+                  <a:srgbClr val="000000"/>
+                </a:solidFill>
+                <a:effectLst/>
+                <a:uFillTx/>
+                <a:latin typeface="Arial"/>
+              </a:rPr>
+              <a:t>f</a:t>
+            </a:r>
+            <a:r>
+              <a:rPr lang="ru-RU" sz="4400" b="0" u="none" strike="noStrike">
+                <a:solidFill>
+                  <a:srgbClr val="000000"/>
+                </a:solidFill>
+                <a:effectLst/>
+                <a:uFillTx/>
+                <a:latin typeface="Arial"/>
+              </a:rPr>
+              <a:t>o</a:t>
+            </a:r>
+            <a:r>
+              <a:rPr lang="ru-RU" sz="4400" b="0" u="none" strike="noStrike">
+                <a:solidFill>
+                  <a:srgbClr val="000000"/>
+                </a:solidFill>
+                <a:effectLst/>
+                <a:uFillTx/>
+                <a:latin typeface="Arial"/>
+              </a:rPr>
+              <a:t>r</a:t>
+            </a:r>
+            <a:r>
+              <a:rPr lang="ru-RU" sz="4400" b="0" u="none" strike="noStrike">
+                <a:solidFill>
+                  <a:srgbClr val="000000"/>
+                </a:solidFill>
+                <a:effectLst/>
+                <a:uFillTx/>
+                <a:latin typeface="Arial"/>
+              </a:rPr>
+              <a:t>m</a:t>
+            </a:r>
+            <a:r>
+              <a:rPr lang="ru-RU" sz="4400" b="0" u="none" strike="noStrike">
+                <a:solidFill>
+                  <a:srgbClr val="000000"/>
+                </a:solidFill>
+                <a:effectLst/>
+                <a:uFillTx/>
+                <a:latin typeface="Arial"/>
+              </a:rPr>
+              <a:t>a</a:t>
+            </a:r>
+            <a:r>
+              <a:rPr lang="ru-RU" sz="4400" b="0" u="none" strike="noStrike">
+                <a:solidFill>
+                  <a:srgbClr val="000000"/>
+                </a:solidFill>
+                <a:effectLst/>
+                <a:uFillTx/>
+                <a:latin typeface="Arial"/>
+              </a:rPr>
+              <a:t>t</a:t>
             </a:r>
             <a:endParaRPr lang="ru-RU" sz="4400" b="0" u="none" strike="noStrike">
               <a:solidFill>
@@ -4154,7 +4528,7 @@
                 <a:tab algn="l" pos="0"/>
               </a:tabLst>
             </a:pPr>
-            <a:fld id="{F6BD9FE0-0CB2-45E3-B86F-4AB47522F954}" type="slidenum">
+            <a:fld id="{AB459A46-6153-4AF7-B196-A599AFE0A3FA}" type="slidenum">
               <a:rPr lang="en-US" sz="1200" b="0" u="none" strike="noStrike">
                 <a:solidFill>
                   <a:srgbClr val="888888"/>
@@ -4246,18 +4620,7 @@
                 <a:uFillTx/>
                 <a:latin typeface="Arial"/>
               </a:rPr>
-              <a:t>Click to edit the title text </a:t>
-            </a:r>
-            <a:r>
-              <a:rPr lang="ru-RU" sz="4000" b="0" u="none" strike="noStrike">
-                <a:solidFill>
-                  <a:srgbClr val="000000"/>
-                </a:solidFill>
-                <a:effectLst/>
-                <a:uFillTx/>
-                <a:latin typeface="Arial"/>
-              </a:rPr>
-              <a:t>format</a:t>
+              <a:t>Click to edit the title text format</a:t>
             </a:r>
             <a:endParaRPr lang="ru-RU" sz="4000" b="0" u="none" strike="noStrike">
               <a:solidFill>
@@ -4712,7 +5075,7 @@
                 <a:tab algn="l" pos="0"/>
               </a:tabLst>
             </a:pPr>
-            <a:fld id="{F2E8F7ED-A39E-4021-BA32-A2C2E77094FA}" type="slidenum">
+            <a:fld id="{B889C71C-105D-4DBE-9D0A-412A28759C4B}" type="slidenum">
               <a:rPr lang="en-US" sz="1200" b="0" u="none" strike="noStrike">
                 <a:solidFill>
                   <a:srgbClr val="888888"/>
@@ -5512,7 +5875,7 @@
                 <a:tab algn="l" pos="0"/>
               </a:tabLst>
             </a:pPr>
-            <a:fld id="{45ED75FC-CEBA-496C-9068-8020C33CB860}" type="slidenum">
+            <a:fld id="{50412353-3D2D-4313-8934-F16E83FFCEF1}" type="slidenum">
               <a:rPr lang="en-US" sz="1200" b="0" u="none" strike="noStrike">
                 <a:solidFill>
                   <a:srgbClr val="888888"/>
@@ -6818,7 +7181,7 @@
                 <a:tab algn="l" pos="0"/>
               </a:tabLst>
             </a:pPr>
-            <a:fld id="{6C0E9C36-F06B-4F16-B677-810374BC9972}" type="slidenum">
+            <a:fld id="{87AC0C75-0C47-44A0-85E8-06FE33637B7F}" type="slidenum">
               <a:rPr lang="en-US" sz="1200" b="0" u="none" strike="noStrike">
                 <a:solidFill>
                   <a:srgbClr val="888888"/>
@@ -7112,7 +7475,7 @@
                 <a:tab algn="l" pos="0"/>
               </a:tabLst>
             </a:pPr>
-            <a:fld id="{6735430A-15FE-40BD-A543-C14FC18EF416}" type="slidenum">
+            <a:fld id="{63923551-F844-49A6-B64E-AF18AEE53451}" type="slidenum">
               <a:rPr lang="en-US" sz="1200" b="0" u="none" strike="noStrike">
                 <a:solidFill>
                   <a:srgbClr val="888888"/>
@@ -8993,7 +9356,7 @@
         <p:spPr>
           <a:xfrm>
             <a:off x="6840360" y="612360"/>
-            <a:ext cx="5200200" cy="487080"/>
+            <a:ext cx="5200200" cy="974520"/>
           </a:xfrm>
           <a:prstGeom prst="rect">
             <a:avLst/>
@@ -9032,7 +9395,7 @@
                 <a:latin typeface="Urbanist"/>
                 <a:ea typeface="Urbanist"/>
               </a:rPr>
-              <a:t>топ песен по удержанию</a:t>
+              <a:t>песни по длине внутри жанров</a:t>
             </a:r>
             <a:endParaRPr lang="ru-RU" sz="3200" b="0" u="none" strike="noStrike">
               <a:solidFill>
@@ -9057,8 +9420,8 @@
         </p:blipFill>
         <p:spPr>
           <a:xfrm>
-            <a:off x="408240" y="1800000"/>
-            <a:ext cx="8411760" cy="1893600"/>
+            <a:off x="6465600" y="2214000"/>
+            <a:ext cx="5234400" cy="4446000"/>
           </a:xfrm>
           <a:prstGeom prst="rect">
             <a:avLst/>
@@ -9081,8 +9444,8 @@
         </p:blipFill>
         <p:spPr>
           <a:xfrm>
-            <a:off x="6660000" y="4770000"/>
-            <a:ext cx="5220000" cy="1710000"/>
+            <a:off x="319680" y="1440000"/>
+            <a:ext cx="9760320" cy="1837440"/>
           </a:xfrm>
           <a:prstGeom prst="rect">
             <a:avLst/>
@@ -9431,7 +9794,7 @@
         <p:spPr>
           <a:xfrm>
             <a:off x="6762600" y="2019240"/>
-            <a:ext cx="4857480" cy="571320"/>
+            <a:ext cx="4857480" cy="343080"/>
           </a:xfrm>
           <a:prstGeom prst="rect">
             <a:avLst/>
@@ -9461,7 +9824,7 @@
               </a:tabLst>
             </a:pPr>
             <a:r>
-              <a:rPr lang="en-US" sz="1500" b="1" u="none" strike="noStrike">
+              <a:rPr lang="en-US" sz="1500" b="0" u="none" strike="noStrike">
                 <a:solidFill>
                   <a:srgbClr val="cbd5e1"/>
                 </a:solidFill>
@@ -9470,19 +9833,7 @@
                 <a:latin typeface="Inter"/>
                 <a:ea typeface="Inter"/>
               </a:rPr>
-              <a:t>Прогнозирование:</a:t>
-            </a:r>
-            <a:r>
-              <a:rPr lang="en-US" sz="1500" b="0" u="none" strike="noStrike">
-                <a:solidFill>
-                  <a:srgbClr val="cbd5e1"/>
-                </a:solidFill>
-                <a:effectLst/>
-                <a:uFillTx/>
-                <a:latin typeface="Inter"/>
-                <a:ea typeface="Inter"/>
-              </a:rPr>
-              <a:t> Отслеживание "оттока" пользователей по истории подписок.</a:t>
+              <a:t>Анализ популярности песен</a:t>
             </a:r>
             <a:endParaRPr lang="ru-RU" sz="1500" b="0" u="none" strike="noStrike">
               <a:solidFill>
@@ -9504,7 +9855,7 @@
         <p:spPr>
           <a:xfrm>
             <a:off x="6762600" y="2828880"/>
-            <a:ext cx="4857480" cy="571320"/>
+            <a:ext cx="4857480" cy="343080"/>
           </a:xfrm>
           <a:prstGeom prst="rect">
             <a:avLst/>
@@ -9534,7 +9885,7 @@
               </a:tabLst>
             </a:pPr>
             <a:r>
-              <a:rPr lang="en-US" sz="1500" b="1" u="none" strike="noStrike">
+              <a:rPr lang="en-US" sz="1500" b="0" u="none" strike="noStrike">
                 <a:solidFill>
                   <a:srgbClr val="cbd5e1"/>
                 </a:solidFill>
@@ -9543,19 +9894,7 @@
                 <a:latin typeface="Inter"/>
                 <a:ea typeface="Inter"/>
               </a:rPr>
-              <a:t>Рекомендации:</a:t>
-            </a:r>
-            <a:r>
-              <a:rPr lang="en-US" sz="1500" b="0" u="none" strike="noStrike">
-                <a:solidFill>
-                  <a:srgbClr val="cbd5e1"/>
-                </a:solidFill>
-                <a:effectLst/>
-                <a:uFillTx/>
-                <a:latin typeface="Inter"/>
-                <a:ea typeface="Inter"/>
-              </a:rPr>
-              <a:t> Анализ предпочтений на основе частоты прослушивания жанров.</a:t>
+              <a:t>История платежей</a:t>
             </a:r>
             <a:endParaRPr lang="ru-RU" sz="1500" b="0" u="none" strike="noStrike">
               <a:solidFill>
@@ -9577,7 +9916,7 @@
         <p:spPr>
           <a:xfrm>
             <a:off x="6762600" y="3638520"/>
-            <a:ext cx="4857480" cy="571320"/>
+            <a:ext cx="4857480" cy="343080"/>
           </a:xfrm>
           <a:prstGeom prst="rect">
             <a:avLst/>
@@ -9607,7 +9946,7 @@
               </a:tabLst>
             </a:pPr>
             <a:r>
-              <a:rPr lang="en-US" sz="1500" b="1" u="none" strike="noStrike">
+              <a:rPr lang="en-US" sz="1500" b="0" u="none" strike="noStrike">
                 <a:solidFill>
                   <a:srgbClr val="cbd5e1"/>
                 </a:solidFill>
@@ -9616,19 +9955,7 @@
                 <a:latin typeface="Inter"/>
                 <a:ea typeface="Inter"/>
               </a:rPr>
-              <a:t>Безопасность:</a:t>
-            </a:r>
-            <a:r>
-              <a:rPr lang="en-US" sz="1500" b="0" u="none" strike="noStrike">
-                <a:solidFill>
-                  <a:srgbClr val="cbd5e1"/>
-                </a:solidFill>
-                <a:effectLst/>
-                <a:uFillTx/>
-                <a:latin typeface="Inter"/>
-                <a:ea typeface="Inter"/>
-              </a:rPr>
-              <a:t> Хеширование паролей (pgcrypto) и защита персональных данных.</a:t>
+              <a:t>Система артистов и лейблов</a:t>
             </a:r>
             <a:endParaRPr lang="ru-RU" sz="1500" b="0" u="none" strike="noStrike">
               <a:solidFill>
@@ -10289,7 +10616,7 @@
         <p:spPr>
           <a:xfrm>
             <a:off x="8471160" y="2195640"/>
-            <a:ext cx="2946600" cy="361440"/>
+            <a:ext cx="2946600" cy="365400"/>
           </a:xfrm>
           <a:prstGeom prst="rect">
             <a:avLst/>
@@ -10328,7 +10655,7 @@
                 <a:latin typeface="Urbanist"/>
                 <a:ea typeface="Urbanist"/>
               </a:rPr>
-              <a:t>Типы данных</a:t>
+              <a:t>Безопасность</a:t>
             </a:r>
             <a:endParaRPr lang="ru-RU" sz="2400" b="0" u="none" strike="noStrike">
               <a:solidFill>
@@ -10350,7 +10677,7 @@
         <p:spPr>
           <a:xfrm>
             <a:off x="8471160" y="2747880"/>
-            <a:ext cx="2806560" cy="1427760"/>
+            <a:ext cx="2806560" cy="1142280"/>
           </a:xfrm>
           <a:prstGeom prst="rect">
             <a:avLst/>
@@ -10401,7 +10728,7 @@
                 <a:latin typeface="Inter"/>
                 <a:ea typeface="Inter"/>
               </a:rPr>
-              <a:t> Валидация путей файлов и email.</a:t>
+              <a:t> Хранить пароли открыто небезопасно.</a:t>
             </a:r>
             <a:br>
               <a:rPr sz="1800"/>
@@ -10428,7 +10755,7 @@
                 <a:latin typeface="Inter"/>
                 <a:ea typeface="Inter"/>
               </a:rPr>
-              <a:t> Использование CREATE DOMAIN с регулярным выражением</a:t>
+              <a:t> Хэширование засоленных паролей.</a:t>
             </a:r>
             <a:endParaRPr lang="ru-RU" sz="1500" b="0" u="none" strike="noStrike">
               <a:solidFill>
@@ -10806,7 +11133,7 @@
         <p:spPr>
           <a:xfrm>
             <a:off x="2714760" y="3271680"/>
-            <a:ext cx="7191000" cy="285480"/>
+            <a:ext cx="7191000" cy="342360"/>
           </a:xfrm>
           <a:prstGeom prst="rect">
             <a:avLst/>
@@ -10845,7 +11172,7 @@
                 <a:latin typeface="Inter"/>
                 <a:ea typeface="Inter"/>
               </a:rPr>
-              <a:t>Модель данных соответствует всем бизнес-требованиям заказчика.</a:t>
+              <a:t>Модель данных соответствует всем требованиям</a:t>
             </a:r>
             <a:endParaRPr lang="ru-RU" sz="1500" b="0" u="none" strike="noStrike">
               <a:solidFill>
@@ -10867,7 +11194,7 @@
         <p:spPr>
           <a:xfrm>
             <a:off x="2714760" y="3795840"/>
-            <a:ext cx="7191000" cy="285480"/>
+            <a:ext cx="7191000" cy="342360"/>
           </a:xfrm>
           <a:prstGeom prst="rect">
             <a:avLst/>
@@ -10906,7 +11233,7 @@
                 <a:latin typeface="Inter"/>
                 <a:ea typeface="Inter"/>
               </a:rPr>
-              <a:t>Архитектура масштабируема и позволяет добавлять новые типы контента.</a:t>
+              <a:t>Архитектура масштабируемая и позволяет добавлять новые типы контента</a:t>
             </a:r>
             <a:endParaRPr lang="ru-RU" sz="1500" b="0" u="none" strike="noStrike">
               <a:solidFill>
@@ -10928,7 +11255,7 @@
         <p:spPr>
           <a:xfrm>
             <a:off x="2714760" y="4319640"/>
-            <a:ext cx="7191000" cy="285480"/>
+            <a:ext cx="7191000" cy="342360"/>
           </a:xfrm>
           <a:prstGeom prst="rect">
             <a:avLst/>
@@ -10967,7 +11294,7 @@
                 <a:latin typeface="Inter"/>
                 <a:ea typeface="Inter"/>
               </a:rPr>
-              <a:t>Использование триггеров снизило нагрузку на backend-приложение.</a:t>
+              <a:t>Использование триггеров снизило нагрузку на backend-приложение</a:t>
             </a:r>
             <a:endParaRPr lang="ru-RU" sz="1500" b="0" u="none" strike="noStrike">
               <a:solidFill>
@@ -11938,7 +12265,7 @@
         <p:spPr>
           <a:xfrm>
             <a:off x="4692600" y="3857760"/>
-            <a:ext cx="2806560" cy="1142640"/>
+            <a:ext cx="2806560" cy="1370520"/>
           </a:xfrm>
           <a:prstGeom prst="rect">
             <a:avLst/>
@@ -11977,7 +12304,7 @@
                 <a:latin typeface="Inter"/>
                 <a:ea typeface="Inter"/>
               </a:rPr>
-              <a:t>Артисты, лейблы и сотрудники. Пользователи могут подавать заявки на роль правообладателей.</a:t>
+              <a:t>Артисты, лейблы и сотрудники. Пользователи могут подавать заявки на эти роли.</a:t>
             </a:r>
             <a:endParaRPr lang="ru-RU" sz="1500" b="0" u="none" strike="noStrike">
               <a:solidFill>
@@ -12060,7 +12387,7 @@
         <p:spPr>
           <a:xfrm>
             <a:off x="8471160" y="3857760"/>
-            <a:ext cx="2806560" cy="1142640"/>
+            <a:ext cx="2806560" cy="1370520"/>
           </a:xfrm>
           <a:prstGeom prst="rect">
             <a:avLst/>
@@ -12099,7 +12426,7 @@
                 <a:latin typeface="Inter"/>
                 <a:ea typeface="Inter"/>
               </a:rPr>
-              <a:t>Доступ к прослушиванию только при активной платной подписке. Хранение истории транзакций.</a:t>
+              <a:t>Доступ к прослушиванию только при активной платной подписке. Хранение истории оплаты.</a:t>
             </a:r>
             <a:endParaRPr lang="ru-RU" sz="1500" b="0" u="none" strike="noStrike">
               <a:solidFill>
@@ -12505,8 +12832,8 @@
         </p:blipFill>
         <p:spPr>
           <a:xfrm>
-            <a:off x="522000" y="2016000"/>
-            <a:ext cx="11147760" cy="4133880"/>
+            <a:off x="515880" y="1995120"/>
+            <a:ext cx="11160000" cy="4130280"/>
           </a:xfrm>
           <a:prstGeom prst="rect">
             <a:avLst/>
